--- a/weekly_ai_skills_sharing_deck.pptx
+++ b/weekly_ai_skills_sharing_deck.pptx
@@ -10054,45 +10054,6 @@
               <a:t>Wang, Y. et al. · arXiv:2608.10509 · posted 11 August 2026 · results from a controlled synthetic benchmark</a:t>
             </a:r>
             <a:endParaRPr lang="en-US" sz="1100" dirty="0"/>
-          </a:p>
-        </p:txBody>
-      </p:sp>
-      <p:sp>
-        <p:nvSpPr>
-          <p:cNvPr id="13" name="Text 11"/>
-          <p:cNvSpPr/>
-          <p:nvPr/>
-        </p:nvSpPr>
-        <p:spPr>
-          <a:xfrm>
-            <a:off x="932688" y="4828032"/>
-            <a:ext cx="10607040" cy="274320"/>
-          </a:xfrm>
-          <a:prstGeom prst="rect">
-            <a:avLst/>
-          </a:prstGeom>
-          <a:noFill/>
-          <a:ln/>
-        </p:spPr>
-        <p:txBody>
-          <a:bodyPr wrap="square" lIns="0" tIns="0" rIns="0" bIns="0" rtlCol="0" anchor="ctr"/>
-          <a:lstStyle/>
-          <a:p>
-            <a:pPr marL="0" indent="0">
-              <a:buNone/>
-            </a:pPr>
-            <a:r>
-              <a:rPr lang="en-US" sz="1200" b="1" i="1" dirty="0">
-                <a:solidFill>
-                  <a:srgbClr val="7A2E3C"/>
-                </a:solidFill>
-                <a:latin typeface="Calibri" pitchFamily="34" charset="0"/>
-                <a:ea typeface="Calibri" pitchFamily="34" charset="-122"/>
-                <a:cs typeface="Calibri" pitchFamily="34" charset="-120"/>
-              </a:rPr>
-              <a:t>All three are preprints — direction of travel, not settled practice.</a:t>
-            </a:r>
-            <a:endParaRPr lang="en-US" sz="1200" dirty="0"/>
           </a:p>
         </p:txBody>
       </p:sp>
